--- a/Slides/Module 01.2 User Stories.pptx
+++ b/Slides/Module 01.2 User Stories.pptx
@@ -3683,7 +3683,7 @@
           <a:p>
             <a:fld id="{7C7E5181-6CF5-45F7-A87A-E0E0B1FD7549}" type="datetimeFigureOut">
               <a:rPr lang="en-US" smtClean="0"/>
-              <a:t>7/8/2026</a:t>
+              <a:t>8/17/2026</a:t>
             </a:fld>
             <a:endParaRPr lang="en-US"/>
           </a:p>
@@ -8538,7 +8538,7 @@
           <a:p>
             <a:fld id="{5D2A64DE-480B-420F-9649-4F8E696E08E0}" type="datetime1">
               <a:rPr lang="en-US" smtClean="0"/>
-              <a:t>7/8/2026</a:t>
+              <a:t>8/17/2026</a:t>
             </a:fld>
             <a:endParaRPr lang="en-US"/>
           </a:p>
@@ -8862,7 +8862,7 @@
           <a:p>
             <a:fld id="{EA476A42-A091-4468-A075-64A31BE59948}" type="datetime1">
               <a:rPr lang="en-US" smtClean="0"/>
-              <a:t>7/8/2026</a:t>
+              <a:t>8/17/2026</a:t>
             </a:fld>
             <a:endParaRPr lang="en-US"/>
           </a:p>
@@ -9060,7 +9060,7 @@
           <a:p>
             <a:fld id="{0D3616D0-8311-4107-9726-6B805E7D05BA}" type="datetime1">
               <a:rPr lang="en-US" smtClean="0"/>
-              <a:t>7/8/2026</a:t>
+              <a:t>8/17/2026</a:t>
             </a:fld>
             <a:endParaRPr lang="en-US"/>
           </a:p>
@@ -9268,7 +9268,7 @@
           <a:p>
             <a:fld id="{3BC2557A-5C88-417A-A763-5AC779462A5F}" type="datetime1">
               <a:rPr lang="en-US" smtClean="0"/>
-              <a:t>7/8/2026</a:t>
+              <a:t>8/17/2026</a:t>
             </a:fld>
             <a:endParaRPr lang="en-US"/>
           </a:p>
@@ -9792,7 +9792,7 @@
           <a:p>
             <a:fld id="{07C7BFD4-467E-4EDE-93EA-052F5B39A4E5}" type="datetime1">
               <a:rPr lang="en-US" smtClean="0"/>
-              <a:t>7/8/2026</a:t>
+              <a:t>8/17/2026</a:t>
             </a:fld>
             <a:endParaRPr lang="en-US"/>
           </a:p>
@@ -10042,7 +10042,7 @@
           <a:p>
             <a:fld id="{07C7BFD4-467E-4EDE-93EA-052F5B39A4E5}" type="datetime1">
               <a:rPr lang="en-US" smtClean="0"/>
-              <a:t>7/8/2026</a:t>
+              <a:t>8/17/2026</a:t>
             </a:fld>
             <a:endParaRPr lang="en-US"/>
           </a:p>
@@ -10224,7 +10224,7 @@
           <a:p>
             <a:fld id="{109E55A0-C911-4F03-82FC-7E5926047D46}" type="datetime1">
               <a:rPr lang="en-US" smtClean="0"/>
-              <a:t>7/8/2026</a:t>
+              <a:t>8/17/2026</a:t>
             </a:fld>
             <a:endParaRPr lang="en-US"/>
           </a:p>
@@ -10537,7 +10537,7 @@
           <a:p>
             <a:fld id="{A533CBE2-D5BE-47AC-ADC2-9CDFC1D0CF90}" type="datetime1">
               <a:rPr lang="en-US" smtClean="0"/>
-              <a:t>7/8/2026</a:t>
+              <a:t>8/17/2026</a:t>
             </a:fld>
             <a:endParaRPr lang="en-US"/>
           </a:p>
@@ -10838,7 +10838,7 @@
           <a:p>
             <a:fld id="{39B7EDB1-CE74-4951-85A2-0B01C2128E28}" type="datetime1">
               <a:rPr lang="en-US" smtClean="0"/>
-              <a:t>7/8/2026</a:t>
+              <a:t>8/17/2026</a:t>
             </a:fld>
             <a:endParaRPr lang="en-US"/>
           </a:p>
@@ -11286,7 +11286,7 @@
           <a:p>
             <a:fld id="{2BC7EB92-A5C2-4807-A9DC-9EDE6CBFB241}" type="datetime1">
               <a:rPr lang="en-US" smtClean="0"/>
-              <a:t>7/8/2026</a:t>
+              <a:t>8/17/2026</a:t>
             </a:fld>
             <a:endParaRPr lang="en-US"/>
           </a:p>
@@ -11399,7 +11399,7 @@
           <a:p>
             <a:fld id="{2B7B7EE0-7771-4CD5-9B2B-3550753A54A1}" type="datetime1">
               <a:rPr lang="en-US" smtClean="0"/>
-              <a:t>7/8/2026</a:t>
+              <a:t>8/17/2026</a:t>
             </a:fld>
             <a:endParaRPr lang="en-US"/>
           </a:p>
@@ -11710,7 +11710,7 @@
           <a:p>
             <a:fld id="{F8B318B3-0E87-4416-A9B8-D891968C2727}" type="datetime1">
               <a:rPr lang="en-US" smtClean="0"/>
-              <a:t>7/8/2026</a:t>
+              <a:t>8/17/2026</a:t>
             </a:fld>
             <a:endParaRPr lang="en-US"/>
           </a:p>
@@ -11951,7 +11951,7 @@
           <a:p>
             <a:fld id="{54D997E8-DDEE-43F1-8D9B-F8A1E11DE488}" type="datetime1">
               <a:rPr lang="en-US" smtClean="0"/>
-              <a:t>7/8/2026</a:t>
+              <a:t>8/17/2026</a:t>
             </a:fld>
             <a:endParaRPr lang="en-US"/>
           </a:p>
@@ -18454,9 +18454,16 @@
             <p:ph idx="1"/>
           </p:nvPr>
         </p:nvSpPr>
-        <p:spPr/>
-        <p:txBody>
-          <a:bodyPr/>
+        <p:spPr>
+          <a:xfrm>
+            <a:off x="838199" y="1500160"/>
+            <a:ext cx="9837717" cy="4351338"/>
+          </a:xfrm>
+        </p:spPr>
+        <p:txBody>
+          <a:bodyPr>
+            <a:normAutofit lnSpcReduction="10000"/>
+          </a:bodyPr>
           <a:lstStyle/>
           <a:p>
             <a:r>
@@ -18475,6 +18482,26 @@
               <a:rPr lang="en-US" dirty="0"/>
               <a:t>Caution: when proposing a project, don't make your MVP too hard to complete (but don't make it too easy, either)</a:t>
             </a:r>
+          </a:p>
+          <a:p>
+            <a:endParaRPr lang="en-US" dirty="0"/>
+          </a:p>
+          <a:p>
+            <a:r>
+              <a:rPr lang="en-US" dirty="0"/>
+              <a:t>For course project, MVP is worth 8% of the course grade and desirable features are </a:t>
+            </a:r>
+            <a:r>
+              <a:rPr lang="en-US"/>
+              <a:t>worth additional 4</a:t>
+            </a:r>
+            <a:r>
+              <a:rPr lang="en-US" dirty="0"/>
+              <a:t>%.</a:t>
+            </a:r>
+          </a:p>
+          <a:p>
+            <a:endParaRPr lang="en-US" dirty="0"/>
           </a:p>
           <a:p>
             <a:endParaRPr lang="en-US" dirty="0"/>

--- a/Slides/Module 01.2 User Stories.pptx
+++ b/Slides/Module 01.2 User Stories.pptx
@@ -3685,7 +3685,7 @@
           <a:p>
             <a:fld id="{7C7E5181-6CF5-45F7-A87A-E0E0B1FD7549}" type="datetimeFigureOut">
               <a:rPr lang="en-US" smtClean="0"/>
-              <a:t>8/17/2026</a:t>
+              <a:t>8/18/2026</a:t>
             </a:fld>
             <a:endParaRPr lang="en-US"/>
           </a:p>
@@ -8648,7 +8648,7 @@
           <a:p>
             <a:fld id="{5D2A64DE-480B-420F-9649-4F8E696E08E0}" type="datetime1">
               <a:rPr lang="en-US" smtClean="0"/>
-              <a:t>8/17/2026</a:t>
+              <a:t>8/18/2026</a:t>
             </a:fld>
             <a:endParaRPr lang="en-US"/>
           </a:p>
@@ -8972,7 +8972,7 @@
           <a:p>
             <a:fld id="{EA476A42-A091-4468-A075-64A31BE59948}" type="datetime1">
               <a:rPr lang="en-US" smtClean="0"/>
-              <a:t>8/17/2026</a:t>
+              <a:t>8/18/2026</a:t>
             </a:fld>
             <a:endParaRPr lang="en-US"/>
           </a:p>
@@ -9170,7 +9170,7 @@
           <a:p>
             <a:fld id="{0D3616D0-8311-4107-9726-6B805E7D05BA}" type="datetime1">
               <a:rPr lang="en-US" smtClean="0"/>
-              <a:t>8/17/2026</a:t>
+              <a:t>8/18/2026</a:t>
             </a:fld>
             <a:endParaRPr lang="en-US"/>
           </a:p>
@@ -9378,7 +9378,7 @@
           <a:p>
             <a:fld id="{3BC2557A-5C88-417A-A763-5AC779462A5F}" type="datetime1">
               <a:rPr lang="en-US" smtClean="0"/>
-              <a:t>8/17/2026</a:t>
+              <a:t>8/18/2026</a:t>
             </a:fld>
             <a:endParaRPr lang="en-US"/>
           </a:p>
@@ -9902,7 +9902,7 @@
           <a:p>
             <a:fld id="{07C7BFD4-467E-4EDE-93EA-052F5B39A4E5}" type="datetime1">
               <a:rPr lang="en-US" smtClean="0"/>
-              <a:t>8/17/2026</a:t>
+              <a:t>8/18/2026</a:t>
             </a:fld>
             <a:endParaRPr lang="en-US"/>
           </a:p>
@@ -10152,7 +10152,7 @@
           <a:p>
             <a:fld id="{07C7BFD4-467E-4EDE-93EA-052F5B39A4E5}" type="datetime1">
               <a:rPr lang="en-US" smtClean="0"/>
-              <a:t>8/17/2026</a:t>
+              <a:t>8/18/2026</a:t>
             </a:fld>
             <a:endParaRPr lang="en-US"/>
           </a:p>
@@ -10334,7 +10334,7 @@
           <a:p>
             <a:fld id="{109E55A0-C911-4F03-82FC-7E5926047D46}" type="datetime1">
               <a:rPr lang="en-US" smtClean="0"/>
-              <a:t>8/17/2026</a:t>
+              <a:t>8/18/2026</a:t>
             </a:fld>
             <a:endParaRPr lang="en-US"/>
           </a:p>
@@ -10647,7 +10647,7 @@
           <a:p>
             <a:fld id="{A533CBE2-D5BE-47AC-ADC2-9CDFC1D0CF90}" type="datetime1">
               <a:rPr lang="en-US" smtClean="0"/>
-              <a:t>8/17/2026</a:t>
+              <a:t>8/18/2026</a:t>
             </a:fld>
             <a:endParaRPr lang="en-US"/>
           </a:p>
@@ -10948,7 +10948,7 @@
           <a:p>
             <a:fld id="{39B7EDB1-CE74-4951-85A2-0B01C2128E28}" type="datetime1">
               <a:rPr lang="en-US" smtClean="0"/>
-              <a:t>8/17/2026</a:t>
+              <a:t>8/18/2026</a:t>
             </a:fld>
             <a:endParaRPr lang="en-US"/>
           </a:p>
@@ -11396,7 +11396,7 @@
           <a:p>
             <a:fld id="{2BC7EB92-A5C2-4807-A9DC-9EDE6CBFB241}" type="datetime1">
               <a:rPr lang="en-US" smtClean="0"/>
-              <a:t>8/17/2026</a:t>
+              <a:t>8/18/2026</a:t>
             </a:fld>
             <a:endParaRPr lang="en-US"/>
           </a:p>
@@ -11509,7 +11509,7 @@
           <a:p>
             <a:fld id="{2B7B7EE0-7771-4CD5-9B2B-3550753A54A1}" type="datetime1">
               <a:rPr lang="en-US" smtClean="0"/>
-              <a:t>8/17/2026</a:t>
+              <a:t>8/18/2026</a:t>
             </a:fld>
             <a:endParaRPr lang="en-US"/>
           </a:p>
@@ -11820,7 +11820,7 @@
           <a:p>
             <a:fld id="{F8B318B3-0E87-4416-A9B8-D891968C2727}" type="datetime1">
               <a:rPr lang="en-US" smtClean="0"/>
-              <a:t>8/17/2026</a:t>
+              <a:t>8/18/2026</a:t>
             </a:fld>
             <a:endParaRPr lang="en-US"/>
           </a:p>
@@ -12061,7 +12061,7 @@
           <a:p>
             <a:fld id="{54D997E8-DDEE-43F1-8D9B-F8A1E11DE488}" type="datetime1">
               <a:rPr lang="en-US" smtClean="0"/>
-              <a:t>8/17/2026</a:t>
+              <a:t>8/18/2026</a:t>
             </a:fld>
             <a:endParaRPr lang="en-US"/>
           </a:p>
@@ -15626,7 +15626,7 @@
           <a:p>
             <a:r>
               <a:rPr lang="en-US" dirty="0"/>
-              <a:t>Good Examples of User Stories</a:t>
+              <a:t>Examples of Good User Stories</a:t>
             </a:r>
           </a:p>
         </p:txBody>
@@ -15804,7 +15804,7 @@
           </a:xfrm>
         </p:spPr>
         <p:txBody>
-          <a:bodyPr anchor="ctr"/>
+          <a:bodyPr anchor="t"/>
           <a:lstStyle/>
           <a:p>
             <a:r>
@@ -16302,7 +16302,14 @@
             <a:pPr lvl="1"/>
             <a:r>
               <a:rPr lang="en-US" dirty="0"/>
-              <a:t>Define the relationship between conditions of satisfaction and user stories, and the difference between essential, desired, and extension conditions of satisfaction</a:t>
+              <a:t>Define the relationship between conditions of satisfaction and user stories</a:t>
+            </a:r>
+          </a:p>
+          <a:p>
+            <a:pPr lvl="1"/>
+            <a:r>
+              <a:rPr lang="en-US" dirty="0"/>
+              <a:t>Explain the difference between essential, desired, and extension levels of priority.</a:t>
             </a:r>
           </a:p>
           <a:p>
@@ -19170,7 +19177,7 @@
         </p:spPr>
         <p:txBody>
           <a:bodyPr>
-            <a:normAutofit lnSpcReduction="10000"/>
+            <a:normAutofit/>
           </a:bodyPr>
           <a:lstStyle/>
           <a:p>
@@ -19182,31 +19189,52 @@
           <a:p>
             <a:r>
               <a:rPr lang="en-US" dirty="0"/>
-              <a:t>A user story is "implemented " when all its essential COSs are implemented.</a:t>
-            </a:r>
-          </a:p>
-          <a:p>
-            <a:r>
-              <a:rPr lang="en-US" dirty="0"/>
-              <a:t>Caution: when proposing a project, don't make your MVP too hard to complete (but don't make it too easy, either)</a:t>
+              <a:t>A user story is "implemented " </a:t>
+            </a:r>
+            <a:r>
+              <a:rPr lang="en-US" dirty="0">
+                <a:solidFill>
+                  <a:srgbClr val="FF0000"/>
+                </a:solidFill>
+              </a:rPr>
+              <a:t>when all its essential COSs are implemented.</a:t>
+            </a:r>
+          </a:p>
+          <a:p>
+            <a:r>
+              <a:rPr lang="en-US" dirty="0"/>
+              <a:t>For the </a:t>
+            </a:r>
+            <a:r>
+              <a:rPr lang="en-US" dirty="0" err="1"/>
+              <a:t>ourse</a:t>
+            </a:r>
+            <a:r>
+              <a:rPr lang="en-US" dirty="0"/>
+              <a:t> project, the MVP is worth 8% of the course grade. Any  </a:t>
+            </a:r>
+            <a:r>
+              <a:rPr lang="en-US" dirty="0" err="1"/>
+              <a:t>decsirable</a:t>
+            </a:r>
+            <a:r>
+              <a:rPr lang="en-US" dirty="0"/>
+              <a:t> or extension features that your team delivers are worth up to an additional 4%.</a:t>
+            </a:r>
+            <a:endParaRPr lang="en-US" dirty="0">
+              <a:solidFill>
+                <a:srgbClr val="FF0000"/>
+              </a:solidFill>
+            </a:endParaRPr>
+          </a:p>
+          <a:p>
+            <a:r>
+              <a:rPr lang="en-US" dirty="0"/>
+              <a:t>So: when proposing a project, don't make your MVP too hard to complete (but don't make it too easy, either)</a:t>
             </a:r>
           </a:p>
           <a:p>
             <a:endParaRPr lang="en-US" dirty="0"/>
-          </a:p>
-          <a:p>
-            <a:r>
-              <a:rPr lang="en-US" dirty="0"/>
-              <a:t>For course project, MVP is worth 8% of the course grade and desirable features are </a:t>
-            </a:r>
-            <a:r>
-              <a:rPr lang="en-US"/>
-              <a:t>worth additional 4</a:t>
-            </a:r>
-            <a:r>
-              <a:rPr lang="en-US" dirty="0"/>
-              <a:t>%.</a:t>
-            </a:r>
           </a:p>
           <a:p>
             <a:endParaRPr lang="en-US" dirty="0"/>
@@ -19374,14 +19402,21 @@
             <a:pPr lvl="1"/>
             <a:r>
               <a:rPr lang="en-US" dirty="0"/>
-              <a:t>Define the relationship between conditions of satisfaction and user stories, and the difference between essential, desired, and extension conditions of satisfaction</a:t>
+              <a:t>Define the relationship between conditions of satisfaction and user stories</a:t>
             </a:r>
           </a:p>
           <a:p>
             <a:pPr lvl="1"/>
             <a:r>
               <a:rPr lang="en-US" dirty="0"/>
-              <a:t>Identify functional and non-functional requirements, and give examples of each </a:t>
+              <a:t>Explain the difference between essential, desired, and extension levels of priority.</a:t>
+            </a:r>
+          </a:p>
+          <a:p>
+            <a:pPr lvl="1"/>
+            <a:r>
+              <a:rPr lang="en-US" dirty="0"/>
+              <a:t>Explain the difference between functional and non-functional requirements, and give examples of each </a:t>
             </a:r>
           </a:p>
           <a:p>

--- a/Slides/Module 01.2 User Stories.pptx
+++ b/Slides/Module 01.2 User Stories.pptx
@@ -198,7 +198,7 @@
 </file>
 
 <file path=ppt/diagrams/colors1.xml><?xml version="1.0" encoding="utf-8"?>
-<dgm:colorsDef xmlns:dgm="http://schemas.openxmlformats.org/drawingml/2006/diagram" xmlns:a="http://schemas.openxmlformats.org/drawingml/2006/main" uniqueId="urn:microsoft.com/office/officeart/2005/8/colors/accent1_2">
+<dgm:colorsDef xmlns:dgm="http://schemas.openxmlformats.org/drawingml/2006/diagram" xmlns:a="http://schemas.openxmlformats.org/drawingml/2006/main" uniqueId="urn:microsoft.com/office/officeart/2005/8/colors/accent1_2#1">
   <dgm:title val=""/>
   <dgm:desc val=""/>
   <dgm:catLst>
@@ -948,7 +948,7 @@
 <dgm:dataModel xmlns:dgm="http://schemas.openxmlformats.org/drawingml/2006/diagram" xmlns:a="http://schemas.openxmlformats.org/drawingml/2006/main">
   <dgm:ptLst>
     <dgm:pt modelId="{7851135E-E593-49EB-9C66-FB8F80DCC8EB}" type="doc">
-      <dgm:prSet loTypeId="urn:microsoft.com/office/officeart/2018/2/layout/IconVerticalSolidList" loCatId="icon" qsTypeId="urn:microsoft.com/office/officeart/2005/8/quickstyle/simple1" qsCatId="simple" csTypeId="urn:microsoft.com/office/officeart/2005/8/colors/accent1_2" csCatId="accent1" phldr="1"/>
+      <dgm:prSet loTypeId="urn:microsoft.com/office/officeart/2018/2/layout/IconVerticalSolidList" loCatId="icon" qsTypeId="urn:microsoft.com/office/officeart/2005/8/quickstyle/simple1#1" qsCatId="simple" csTypeId="urn:microsoft.com/office/officeart/2005/8/colors/accent1_2#1" csCatId="accent1" phldr="1"/>
       <dgm:spPr/>
       <dgm:t>
         <a:bodyPr/>
@@ -2570,7 +2570,7 @@
 </file>
 
 <file path=ppt/diagrams/quickStyle1.xml><?xml version="1.0" encoding="utf-8"?>
-<dgm:styleDef xmlns:dgm="http://schemas.openxmlformats.org/drawingml/2006/diagram" xmlns:a="http://schemas.openxmlformats.org/drawingml/2006/main" uniqueId="urn:microsoft.com/office/officeart/2005/8/quickstyle/simple1">
+<dgm:styleDef xmlns:dgm="http://schemas.openxmlformats.org/drawingml/2006/diagram" xmlns:a="http://schemas.openxmlformats.org/drawingml/2006/main" uniqueId="urn:microsoft.com/office/officeart/2005/8/quickstyle/simple1#1">
   <dgm:title val=""/>
   <dgm:desc val=""/>
   <dgm:catLst>
@@ -3685,7 +3685,7 @@
           <a:p>
             <a:fld id="{7C7E5181-6CF5-45F7-A87A-E0E0B1FD7549}" type="datetimeFigureOut">
               <a:rPr lang="en-US" smtClean="0"/>
-              <a:t>8/18/2026</a:t>
+              <a:t>8/20/2026</a:t>
             </a:fld>
             <a:endParaRPr lang="en-US"/>
           </a:p>
@@ -8648,7 +8648,7 @@
           <a:p>
             <a:fld id="{5D2A64DE-480B-420F-9649-4F8E696E08E0}" type="datetime1">
               <a:rPr lang="en-US" smtClean="0"/>
-              <a:t>8/18/2026</a:t>
+              <a:t>8/20/2026</a:t>
             </a:fld>
             <a:endParaRPr lang="en-US"/>
           </a:p>
@@ -8972,7 +8972,7 @@
           <a:p>
             <a:fld id="{EA476A42-A091-4468-A075-64A31BE59948}" type="datetime1">
               <a:rPr lang="en-US" smtClean="0"/>
-              <a:t>8/18/2026</a:t>
+              <a:t>8/20/2026</a:t>
             </a:fld>
             <a:endParaRPr lang="en-US"/>
           </a:p>
@@ -9170,7 +9170,7 @@
           <a:p>
             <a:fld id="{0D3616D0-8311-4107-9726-6B805E7D05BA}" type="datetime1">
               <a:rPr lang="en-US" smtClean="0"/>
-              <a:t>8/18/2026</a:t>
+              <a:t>8/20/2026</a:t>
             </a:fld>
             <a:endParaRPr lang="en-US"/>
           </a:p>
@@ -9378,7 +9378,7 @@
           <a:p>
             <a:fld id="{3BC2557A-5C88-417A-A763-5AC779462A5F}" type="datetime1">
               <a:rPr lang="en-US" smtClean="0"/>
-              <a:t>8/18/2026</a:t>
+              <a:t>8/20/2026</a:t>
             </a:fld>
             <a:endParaRPr lang="en-US"/>
           </a:p>
@@ -9902,7 +9902,7 @@
           <a:p>
             <a:fld id="{07C7BFD4-467E-4EDE-93EA-052F5B39A4E5}" type="datetime1">
               <a:rPr lang="en-US" smtClean="0"/>
-              <a:t>8/18/2026</a:t>
+              <a:t>8/20/2026</a:t>
             </a:fld>
             <a:endParaRPr lang="en-US"/>
           </a:p>
@@ -10152,7 +10152,7 @@
           <a:p>
             <a:fld id="{07C7BFD4-467E-4EDE-93EA-052F5B39A4E5}" type="datetime1">
               <a:rPr lang="en-US" smtClean="0"/>
-              <a:t>8/18/2026</a:t>
+              <a:t>8/20/2026</a:t>
             </a:fld>
             <a:endParaRPr lang="en-US"/>
           </a:p>
@@ -10334,7 +10334,7 @@
           <a:p>
             <a:fld id="{109E55A0-C911-4F03-82FC-7E5926047D46}" type="datetime1">
               <a:rPr lang="en-US" smtClean="0"/>
-              <a:t>8/18/2026</a:t>
+              <a:t>8/20/2026</a:t>
             </a:fld>
             <a:endParaRPr lang="en-US"/>
           </a:p>
@@ -10647,7 +10647,7 @@
           <a:p>
             <a:fld id="{A533CBE2-D5BE-47AC-ADC2-9CDFC1D0CF90}" type="datetime1">
               <a:rPr lang="en-US" smtClean="0"/>
-              <a:t>8/18/2026</a:t>
+              <a:t>8/20/2026</a:t>
             </a:fld>
             <a:endParaRPr lang="en-US"/>
           </a:p>
@@ -10948,7 +10948,7 @@
           <a:p>
             <a:fld id="{39B7EDB1-CE74-4951-85A2-0B01C2128E28}" type="datetime1">
               <a:rPr lang="en-US" smtClean="0"/>
-              <a:t>8/18/2026</a:t>
+              <a:t>8/20/2026</a:t>
             </a:fld>
             <a:endParaRPr lang="en-US"/>
           </a:p>
@@ -11396,7 +11396,7 @@
           <a:p>
             <a:fld id="{2BC7EB92-A5C2-4807-A9DC-9EDE6CBFB241}" type="datetime1">
               <a:rPr lang="en-US" smtClean="0"/>
-              <a:t>8/18/2026</a:t>
+              <a:t>8/20/2026</a:t>
             </a:fld>
             <a:endParaRPr lang="en-US"/>
           </a:p>
@@ -11509,7 +11509,7 @@
           <a:p>
             <a:fld id="{2B7B7EE0-7771-4CD5-9B2B-3550753A54A1}" type="datetime1">
               <a:rPr lang="en-US" smtClean="0"/>
-              <a:t>8/18/2026</a:t>
+              <a:t>8/20/2026</a:t>
             </a:fld>
             <a:endParaRPr lang="en-US"/>
           </a:p>
@@ -11820,7 +11820,7 @@
           <a:p>
             <a:fld id="{F8B318B3-0E87-4416-A9B8-D891968C2727}" type="datetime1">
               <a:rPr lang="en-US" smtClean="0"/>
-              <a:t>8/18/2026</a:t>
+              <a:t>8/20/2026</a:t>
             </a:fld>
             <a:endParaRPr lang="en-US"/>
           </a:p>
@@ -12061,7 +12061,7 @@
           <a:p>
             <a:fld id="{54D997E8-DDEE-43F1-8D9B-F8A1E11DE488}" type="datetime1">
               <a:rPr lang="en-US" smtClean="0"/>
-              <a:t>8/18/2026</a:t>
+              <a:t>8/20/2026</a:t>
             </a:fld>
             <a:endParaRPr lang="en-US"/>
           </a:p>
@@ -12647,7 +12647,7 @@
                   <a:srgbClr val="5C5962"/>
                 </a:solidFill>
               </a:rPr>
-              <a:t>© 2026 Released under the </a:t>
+              <a:t>© 2026-27 Released under the </a:t>
             </a:r>
             <a:r>
               <a:rPr lang="en-US" dirty="0">
@@ -19203,23 +19203,7 @@
           <a:p>
             <a:r>
               <a:rPr lang="en-US" dirty="0"/>
-              <a:t>For the </a:t>
-            </a:r>
-            <a:r>
-              <a:rPr lang="en-US" dirty="0" err="1"/>
-              <a:t>ourse</a:t>
-            </a:r>
-            <a:r>
-              <a:rPr lang="en-US" dirty="0"/>
-              <a:t> project, the MVP is worth 8% of the course grade. Any  </a:t>
-            </a:r>
-            <a:r>
-              <a:rPr lang="en-US" dirty="0" err="1"/>
-              <a:t>decsirable</a:t>
-            </a:r>
-            <a:r>
-              <a:rPr lang="en-US" dirty="0"/>
-              <a:t> or extension features that your team delivers are worth up to an additional 4%.</a:t>
+              <a:t>For the course project, the MVP is worth 8% of the course grade. Any desirable (or extension) features that your team delivers are worth up to an additional 4%.</a:t>
             </a:r>
             <a:endParaRPr lang="en-US" dirty="0">
               <a:solidFill>
@@ -19232,15 +19216,6 @@
               <a:rPr lang="en-US" dirty="0"/>
               <a:t>So: when proposing a project, don't make your MVP too hard to complete (but don't make it too easy, either)</a:t>
             </a:r>
-          </a:p>
-          <a:p>
-            <a:endParaRPr lang="en-US" dirty="0"/>
-          </a:p>
-          <a:p>
-            <a:endParaRPr lang="en-US" dirty="0"/>
-          </a:p>
-          <a:p>
-            <a:endParaRPr lang="en-US" dirty="0"/>
           </a:p>
         </p:txBody>
       </p:sp>
